--- a/classes/parte-14-grc-riesgo-y-cumplimiento/287-metricas-de-seguridad-kpis-y-kris/clase-287-presentacion.pptx
+++ b/classes/parte-14-grc-riesgo-y-cumplimiento/287-metricas-de-seguridad-kpis-y-kris/clase-287-presentacion.pptx
@@ -17,6 +17,10 @@
     <p:sldId id="265" r:id="rId16"/>
     <p:sldId id="266" r:id="rId17"/>
     <p:sldId id="267" r:id="rId18"/>
+    <p:sldId id="268" r:id="rId19"/>
+    <p:sldId id="269" r:id="rId20"/>
+    <p:sldId id="270" r:id="rId21"/>
+    <p:sldId id="271" r:id="rId22"/>
   </p:sldIdLst>
   <p:sldSz cx="9144000" cy="6858000" type="screen4x3"/>
   <p:notesSz cx="6858000" cy="9144000"/>
@@ -3198,7 +3202,7 @@
                   <a:srgbClr val="0B3D2E"/>
                 </a:solidFill>
               </a:rPr>
-              <a:t>⚠️ Errores comunes</a:t>
+              <a:t>🧪 Laboratorio guiado (ejercicio aplicado)</a:t>
             </a:r>
           </a:p>
         </p:txBody>
@@ -3236,67 +3240,97 @@
                   <a:srgbClr val="22282E"/>
                 </a:solidFill>
               </a:rPr>
-              <a:t>•  Medir lo fácil, no lo importante — Sesgo del dato disponible; parte de las preguntas de negocio</a:t>
-            </a:r>
-          </a:p>
-          <a:p>
-            <a:pPr>
-              <a:spcAft>
-                <a:spcPts val="600"/>
-              </a:spcAft>
-            </a:pPr>
-            <a:r>
-              <a:rPr sz="1500">
-                <a:solidFill>
-                  <a:srgbClr val="22282E"/>
-                </a:solidFill>
-              </a:rPr>
-              <a:t>•  Vanity metrics en el informe de dirección — Impresionan pero no deciden; sustituye por accionables</a:t>
-            </a:r>
-          </a:p>
-          <a:p>
-            <a:pPr>
-              <a:spcAft>
-                <a:spcPts val="600"/>
-              </a:spcAft>
-            </a:pPr>
-            <a:r>
-              <a:rPr sz="1500">
-                <a:solidFill>
-                  <a:srgbClr val="22282E"/>
-                </a:solidFill>
-              </a:rPr>
-              <a:t>•  Métricas sin umbral — No accionan; añade semáforos verde/ámbar/rojo</a:t>
-            </a:r>
-          </a:p>
-          <a:p>
-            <a:pPr>
-              <a:spcAft>
-                <a:spcPts val="600"/>
-              </a:spcAft>
-            </a:pPr>
-            <a:r>
-              <a:rPr sz="1500">
-                <a:solidFill>
-                  <a:srgbClr val="22282E"/>
-                </a:solidFill>
-              </a:rPr>
-              <a:t>•  Reportar valor absoluto sin tendencia — Se pierde el contexto; muestra evolución temporal</a:t>
-            </a:r>
-          </a:p>
-          <a:p>
-            <a:pPr>
-              <a:spcAft>
-                <a:spcPts val="600"/>
-              </a:spcAft>
-            </a:pPr>
-            <a:r>
-              <a:rPr sz="1500">
-                <a:solidFill>
-                  <a:srgbClr val="22282E"/>
-                </a:solidFill>
-              </a:rPr>
-              <a:t>•  Un dashboard único para todos — Dirección y técnicos necesitan detalles distintos; segmenta</a:t>
+              <a:t>•  Vas a construir el cuadro de mando de seguridad de "Ferretería del Sur S.A.".</a:t>
+            </a:r>
+          </a:p>
+          <a:p>
+            <a:pPr>
+              <a:spcAft>
+                <a:spcPts val="600"/>
+              </a:spcAft>
+            </a:pPr>
+            <a:r>
+              <a:rPr sz="1500">
+                <a:solidFill>
+                  <a:srgbClr val="22282E"/>
+                </a:solidFill>
+              </a:rPr>
+              <a:t>•  Inventario de preguntas: escribe las 5 preguntas que la dirección se hace ("¿estamos más seguros que hace 3 meses?", "¿respondemos rápido?", "¿cumplimos parches?"). Las métricas responderán a estas…</a:t>
+            </a:r>
+          </a:p>
+          <a:p>
+            <a:pPr>
+              <a:spcAft>
+                <a:spcPts val="600"/>
+              </a:spcAft>
+            </a:pPr>
+            <a:r>
+              <a:rPr sz="1500">
+                <a:solidFill>
+                  <a:srgbClr val="22282E"/>
+                </a:solidFill>
+              </a:rPr>
+              <a:t>•  Diseña 8 métricas con su ficha completa. Ejemplos:</a:t>
+            </a:r>
+          </a:p>
+          <a:p>
+            <a:pPr>
+              <a:spcAft>
+                <a:spcPts val="600"/>
+              </a:spcAft>
+            </a:pPr>
+            <a:r>
+              <a:rPr sz="1500">
+                <a:solidFill>
+                  <a:srgbClr val="22282E"/>
+                </a:solidFill>
+              </a:rPr>
+              <a:t>•  KPI: % de sistemas con parches críticos aplicados en &lt; 30 días (umbral ≥ 95%).</a:t>
+            </a:r>
+          </a:p>
+          <a:p>
+            <a:pPr>
+              <a:spcAft>
+                <a:spcPts val="600"/>
+              </a:spcAft>
+            </a:pPr>
+            <a:r>
+              <a:rPr sz="1500">
+                <a:solidFill>
+                  <a:srgbClr val="22282E"/>
+                </a:solidFill>
+              </a:rPr>
+              <a:t>•  KRI: nº de vulnerabilidades críticas abiertas &gt; 30 días (umbral ≤ 5).</a:t>
+            </a:r>
+          </a:p>
+          <a:p>
+            <a:pPr>
+              <a:spcAft>
+                <a:spcPts val="600"/>
+              </a:spcAft>
+            </a:pPr>
+            <a:r>
+              <a:rPr sz="1500">
+                <a:solidFill>
+                  <a:srgbClr val="22282E"/>
+                </a:solidFill>
+              </a:rPr>
+              <a:t>•  KCI: % de accesos con MFA activo (umbral 100%).</a:t>
+            </a:r>
+          </a:p>
+          <a:p>
+            <a:pPr>
+              <a:spcAft>
+                <a:spcPts val="600"/>
+              </a:spcAft>
+            </a:pPr>
+            <a:r>
+              <a:rPr sz="1500">
+                <a:solidFill>
+                  <a:srgbClr val="22282E"/>
+                </a:solidFill>
+              </a:rPr>
+              <a:t>•  Operativa: MTTD y MTTR de incidentes del último trimestre.</a:t>
             </a:r>
           </a:p>
         </p:txBody>
@@ -3347,7 +3381,7 @@
                   <a:srgbClr val="0B3D2E"/>
                 </a:solidFill>
               </a:rPr>
-              <a:t>❓ Preguntas frecuentes</a:t>
+              <a:t>✍️ Ejercicios</a:t>
             </a:r>
           </a:p>
         </p:txBody>
@@ -3385,97 +3419,82 @@
                   <a:srgbClr val="22282E"/>
                 </a:solidFill>
               </a:rPr>
-              <a:t>•  ❓ ¿Cuál es la diferencia esencial entre KPI y KRI?</a:t>
-            </a:r>
-          </a:p>
-          <a:p>
-            <a:pPr>
-              <a:spcAft>
-                <a:spcPts val="600"/>
-              </a:spcAft>
-            </a:pPr>
-            <a:r>
-              <a:rPr sz="1500">
-                <a:solidFill>
-                  <a:srgbClr val="22282E"/>
-                </a:solidFill>
-              </a:rPr>
-              <a:t>•  El KPI mira el rendimiento pasado/actual (retrospectivo); el KRI anticipa un aumento de riesgo (predictivo). Un buen cuadro de mando combina ambos.</a:t>
-            </a:r>
-          </a:p>
-          <a:p>
-            <a:pPr>
-              <a:spcAft>
-                <a:spcPts val="600"/>
-              </a:spcAft>
-            </a:pPr>
-            <a:r>
-              <a:rPr sz="1500">
-                <a:solidFill>
-                  <a:srgbClr val="22282E"/>
-                </a:solidFill>
-              </a:rPr>
-              <a:t>•  ❓ ¿Cuántas métricas debe ver la dirección?</a:t>
-            </a:r>
-          </a:p>
-          <a:p>
-            <a:pPr>
-              <a:spcAft>
-                <a:spcPts val="600"/>
-              </a:spcAft>
-            </a:pPr>
-            <a:r>
-              <a:rPr sz="1500">
-                <a:solidFill>
-                  <a:srgbClr val="22282E"/>
-                </a:solidFill>
-              </a:rPr>
-              <a:t>•  Pocas y potentes: 5–7 con tendencia y semáforo. El detalle operativo va en un dashboard técnico aparte.</a:t>
-            </a:r>
-          </a:p>
-          <a:p>
-            <a:pPr>
-              <a:spcAft>
-                <a:spcPts val="600"/>
-              </a:spcAft>
-            </a:pPr>
-            <a:r>
-              <a:rPr sz="1500">
-                <a:solidFill>
-                  <a:srgbClr val="22282E"/>
-                </a:solidFill>
-              </a:rPr>
-              <a:t>•  ❓ ¿MTTD y MTTR de dónde salen?</a:t>
-            </a:r>
-          </a:p>
-          <a:p>
-            <a:pPr>
-              <a:spcAft>
-                <a:spcPts val="600"/>
-              </a:spcAft>
-            </a:pPr>
-            <a:r>
-              <a:rPr sz="1500">
-                <a:solidFill>
-                  <a:srgbClr val="22282E"/>
-                </a:solidFill>
-              </a:rPr>
-              <a:t>•  De los tickets/registros de incidentes: marca de tiempo de origen, detección y resolución. La calidad del dato depende de un buen registro de incidentes.</a:t>
-            </a:r>
-          </a:p>
-          <a:p>
-            <a:pPr>
-              <a:spcAft>
-                <a:spcPts val="600"/>
-              </a:spcAft>
-            </a:pPr>
-            <a:r>
-              <a:rPr sz="1500">
-                <a:solidFill>
-                  <a:srgbClr val="22282E"/>
-                </a:solidFill>
-              </a:rPr>
-              <a:t>•  ❓ ¿Cómo evito las vanity metrics?</a:t>
+              <a:t>•  Clasifica en KPI, KRI o KCI: % de cuentas con MFA; nº de accesos de administrador anómalos; días desde el último parche crítico pendiente.</a:t>
+            </a:r>
+          </a:p>
+          <a:p>
+            <a:pPr>
+              <a:spcAft>
+                <a:spcPts val="600"/>
+              </a:spcAft>
+            </a:pPr>
+            <a:r>
+              <a:rPr sz="1500">
+                <a:solidFill>
+                  <a:srgbClr val="22282E"/>
+                </a:solidFill>
+              </a:rPr>
+              <a:t>•  Reformula la vanity metric "bloqueamos 2 millones de ataques" en una métrica accionable.</a:t>
+            </a:r>
+          </a:p>
+          <a:p>
+            <a:pPr>
+              <a:spcAft>
+                <a:spcPts val="600"/>
+              </a:spcAft>
+            </a:pPr>
+            <a:r>
+              <a:rPr sz="1500">
+                <a:solidFill>
+                  <a:srgbClr val="22282E"/>
+                </a:solidFill>
+              </a:rPr>
+              <a:t>•  Calcula el MTTR dado un conjunto de 5 incidentes con sus tiempos.</a:t>
+            </a:r>
+          </a:p>
+          <a:p>
+            <a:pPr>
+              <a:spcAft>
+                <a:spcPts val="600"/>
+              </a:spcAft>
+            </a:pPr>
+            <a:r>
+              <a:rPr sz="1500">
+                <a:solidFill>
+                  <a:srgbClr val="22282E"/>
+                </a:solidFill>
+              </a:rPr>
+              <a:t>•  Define umbrales verde/ámbar/rojo para "cobertura de EDR en endpoints".</a:t>
+            </a:r>
+          </a:p>
+          <a:p>
+            <a:pPr>
+              <a:spcAft>
+                <a:spcPts val="600"/>
+              </a:spcAft>
+            </a:pPr>
+            <a:r>
+              <a:rPr sz="1500">
+                <a:solidFill>
+                  <a:srgbClr val="22282E"/>
+                </a:solidFill>
+              </a:rPr>
+              <a:t>•  Diseña una métrica SMART para medir la eficacia del programa de concienciación.</a:t>
+            </a:r>
+          </a:p>
+          <a:p>
+            <a:pPr>
+              <a:spcAft>
+                <a:spcPts val="600"/>
+              </a:spcAft>
+            </a:pPr>
+            <a:r>
+              <a:rPr sz="1500">
+                <a:solidFill>
+                  <a:srgbClr val="22282E"/>
+                </a:solidFill>
+              </a:rPr>
+              <a:t>•  Explica por qué la tendencia importa más que el valor absoluto.</a:t>
             </a:r>
           </a:p>
         </p:txBody>
@@ -3526,7 +3545,7 @@
                   <a:srgbClr val="0B3D2E"/>
                 </a:solidFill>
               </a:rPr>
-              <a:t>🔗 Referencias</a:t>
+              <a:t>📝 Reto verificable</a:t>
             </a:r>
           </a:p>
         </p:txBody>
@@ -3564,6 +3583,438 @@
                   <a:srgbClr val="22282E"/>
                 </a:solidFill>
               </a:rPr>
+              <a:t>•  Entrega un cuadro de mando de seguridad con al menos 8 métricas (mezcla de KPI, KRI y KCI), cada una con ficha completa (fórmula, fuente, umbral, responsable, cadencia), dos métricas calculadas con…</a:t>
+            </a:r>
+          </a:p>
+          <a:p>
+            <a:pPr>
+              <a:spcAft>
+                <a:spcPts val="600"/>
+              </a:spcAft>
+            </a:pPr>
+            <a:r>
+              <a:rPr sz="1500">
+                <a:solidFill>
+                  <a:srgbClr val="22282E"/>
+                </a:solidFill>
+              </a:rPr>
+              <a:t>•  Criterio de aceptación: cada métrica responde a una pregunta de negocio, ninguna es una vanity metric, todas tienen umbral y responsable, y el dashboard de dirección cabe en una página con tendencias.</a:t>
+            </a:r>
+          </a:p>
+        </p:txBody>
+      </p:sp>
+    </p:spTree>
+  </p:cSld>
+  <p:clrMapOvr>
+    <a:masterClrMapping/>
+  </p:clrMapOvr>
+</p:sld>
+</file>
+
+<file path=ppt/slides/slide13.xml><?xml version="1.0" encoding="utf-8"?>
+<p:sld xmlns:a="http://schemas.openxmlformats.org/drawingml/2006/main" xmlns:p="http://schemas.openxmlformats.org/presentationml/2006/main" xmlns:r="http://schemas.openxmlformats.org/officeDocument/2006/relationships">
+  <p:cSld>
+    <p:spTree>
+      <p:nvGrpSpPr>
+        <p:cNvPr id="1" name=""/>
+        <p:cNvGrpSpPr/>
+        <p:nvPr/>
+      </p:nvGrpSpPr>
+      <p:grpSpPr/>
+      <p:sp>
+        <p:nvSpPr>
+          <p:cNvPr id="2" name="TextBox 1"/>
+          <p:cNvSpPr txBox="1"/>
+          <p:nvPr/>
+        </p:nvSpPr>
+        <p:spPr>
+          <a:xfrm>
+            <a:off x="457200" y="320040"/>
+            <a:ext cx="8229600" cy="822960"/>
+          </a:xfrm>
+          <a:prstGeom prst="rect">
+            <a:avLst/>
+          </a:prstGeom>
+          <a:noFill/>
+        </p:spPr>
+        <p:txBody>
+          <a:bodyPr wrap="square">
+            <a:spAutoFit/>
+          </a:bodyPr>
+          <a:lstStyle/>
+          <a:p>
+            <a:r>
+              <a:rPr sz="2600" b="1">
+                <a:solidFill>
+                  <a:srgbClr val="0B3D2E"/>
+                </a:solidFill>
+              </a:rPr>
+              <a:t>⚠️ Errores comunes</a:t>
+            </a:r>
+          </a:p>
+        </p:txBody>
+      </p:sp>
+      <p:sp>
+        <p:nvSpPr>
+          <p:cNvPr id="3" name="TextBox 2"/>
+          <p:cNvSpPr txBox="1"/>
+          <p:nvPr/>
+        </p:nvSpPr>
+        <p:spPr>
+          <a:xfrm>
+            <a:off x="457200" y="1280160"/>
+            <a:ext cx="8229600" cy="4937760"/>
+          </a:xfrm>
+          <a:prstGeom prst="rect">
+            <a:avLst/>
+          </a:prstGeom>
+          <a:noFill/>
+        </p:spPr>
+        <p:txBody>
+          <a:bodyPr wrap="square">
+            <a:spAutoFit/>
+          </a:bodyPr>
+          <a:lstStyle/>
+          <a:p>
+            <a:pPr>
+              <a:spcAft>
+                <a:spcPts val="600"/>
+              </a:spcAft>
+            </a:pPr>
+            <a:r>
+              <a:rPr sz="1500">
+                <a:solidFill>
+                  <a:srgbClr val="22282E"/>
+                </a:solidFill>
+              </a:rPr>
+              <a:t>•  Medir lo fácil, no lo importante — Sesgo del dato disponible; parte de las preguntas de negocio</a:t>
+            </a:r>
+          </a:p>
+          <a:p>
+            <a:pPr>
+              <a:spcAft>
+                <a:spcPts val="600"/>
+              </a:spcAft>
+            </a:pPr>
+            <a:r>
+              <a:rPr sz="1500">
+                <a:solidFill>
+                  <a:srgbClr val="22282E"/>
+                </a:solidFill>
+              </a:rPr>
+              <a:t>•  Vanity metrics en el informe de dirección — Impresionan pero no deciden; sustituye por accionables</a:t>
+            </a:r>
+          </a:p>
+          <a:p>
+            <a:pPr>
+              <a:spcAft>
+                <a:spcPts val="600"/>
+              </a:spcAft>
+            </a:pPr>
+            <a:r>
+              <a:rPr sz="1500">
+                <a:solidFill>
+                  <a:srgbClr val="22282E"/>
+                </a:solidFill>
+              </a:rPr>
+              <a:t>•  Métricas sin umbral — No accionan; añade semáforos verde/ámbar/rojo</a:t>
+            </a:r>
+          </a:p>
+          <a:p>
+            <a:pPr>
+              <a:spcAft>
+                <a:spcPts val="600"/>
+              </a:spcAft>
+            </a:pPr>
+            <a:r>
+              <a:rPr sz="1500">
+                <a:solidFill>
+                  <a:srgbClr val="22282E"/>
+                </a:solidFill>
+              </a:rPr>
+              <a:t>•  Reportar valor absoluto sin tendencia — Se pierde el contexto; muestra evolución temporal</a:t>
+            </a:r>
+          </a:p>
+          <a:p>
+            <a:pPr>
+              <a:spcAft>
+                <a:spcPts val="600"/>
+              </a:spcAft>
+            </a:pPr>
+            <a:r>
+              <a:rPr sz="1500">
+                <a:solidFill>
+                  <a:srgbClr val="22282E"/>
+                </a:solidFill>
+              </a:rPr>
+              <a:t>•  Un dashboard único para todos — Dirección y técnicos necesitan detalles distintos; segmenta</a:t>
+            </a:r>
+          </a:p>
+        </p:txBody>
+      </p:sp>
+    </p:spTree>
+  </p:cSld>
+  <p:clrMapOvr>
+    <a:masterClrMapping/>
+  </p:clrMapOvr>
+</p:sld>
+</file>
+
+<file path=ppt/slides/slide14.xml><?xml version="1.0" encoding="utf-8"?>
+<p:sld xmlns:a="http://schemas.openxmlformats.org/drawingml/2006/main" xmlns:p="http://schemas.openxmlformats.org/presentationml/2006/main" xmlns:r="http://schemas.openxmlformats.org/officeDocument/2006/relationships">
+  <p:cSld>
+    <p:spTree>
+      <p:nvGrpSpPr>
+        <p:cNvPr id="1" name=""/>
+        <p:cNvGrpSpPr/>
+        <p:nvPr/>
+      </p:nvGrpSpPr>
+      <p:grpSpPr/>
+      <p:sp>
+        <p:nvSpPr>
+          <p:cNvPr id="2" name="TextBox 1"/>
+          <p:cNvSpPr txBox="1"/>
+          <p:nvPr/>
+        </p:nvSpPr>
+        <p:spPr>
+          <a:xfrm>
+            <a:off x="457200" y="320040"/>
+            <a:ext cx="8229600" cy="822960"/>
+          </a:xfrm>
+          <a:prstGeom prst="rect">
+            <a:avLst/>
+          </a:prstGeom>
+          <a:noFill/>
+        </p:spPr>
+        <p:txBody>
+          <a:bodyPr wrap="square">
+            <a:spAutoFit/>
+          </a:bodyPr>
+          <a:lstStyle/>
+          <a:p>
+            <a:r>
+              <a:rPr sz="2600" b="1">
+                <a:solidFill>
+                  <a:srgbClr val="0B3D2E"/>
+                </a:solidFill>
+              </a:rPr>
+              <a:t>❓ Preguntas frecuentes</a:t>
+            </a:r>
+          </a:p>
+        </p:txBody>
+      </p:sp>
+      <p:sp>
+        <p:nvSpPr>
+          <p:cNvPr id="3" name="TextBox 2"/>
+          <p:cNvSpPr txBox="1"/>
+          <p:nvPr/>
+        </p:nvSpPr>
+        <p:spPr>
+          <a:xfrm>
+            <a:off x="457200" y="1280160"/>
+            <a:ext cx="8229600" cy="4937760"/>
+          </a:xfrm>
+          <a:prstGeom prst="rect">
+            <a:avLst/>
+          </a:prstGeom>
+          <a:noFill/>
+        </p:spPr>
+        <p:txBody>
+          <a:bodyPr wrap="square">
+            <a:spAutoFit/>
+          </a:bodyPr>
+          <a:lstStyle/>
+          <a:p>
+            <a:pPr>
+              <a:spcAft>
+                <a:spcPts val="600"/>
+              </a:spcAft>
+            </a:pPr>
+            <a:r>
+              <a:rPr sz="1500">
+                <a:solidFill>
+                  <a:srgbClr val="22282E"/>
+                </a:solidFill>
+              </a:rPr>
+              <a:t>•  ❓ ¿Cuál es la diferencia esencial entre KPI y KRI?</a:t>
+            </a:r>
+          </a:p>
+          <a:p>
+            <a:pPr>
+              <a:spcAft>
+                <a:spcPts val="600"/>
+              </a:spcAft>
+            </a:pPr>
+            <a:r>
+              <a:rPr sz="1500">
+                <a:solidFill>
+                  <a:srgbClr val="22282E"/>
+                </a:solidFill>
+              </a:rPr>
+              <a:t>•  El KPI mira el rendimiento pasado/actual (retrospectivo); el KRI anticipa un aumento de riesgo (predictivo). Un buen cuadro de mando combina ambos.</a:t>
+            </a:r>
+          </a:p>
+          <a:p>
+            <a:pPr>
+              <a:spcAft>
+                <a:spcPts val="600"/>
+              </a:spcAft>
+            </a:pPr>
+            <a:r>
+              <a:rPr sz="1500">
+                <a:solidFill>
+                  <a:srgbClr val="22282E"/>
+                </a:solidFill>
+              </a:rPr>
+              <a:t>•  ❓ ¿Cuántas métricas debe ver la dirección?</a:t>
+            </a:r>
+          </a:p>
+          <a:p>
+            <a:pPr>
+              <a:spcAft>
+                <a:spcPts val="600"/>
+              </a:spcAft>
+            </a:pPr>
+            <a:r>
+              <a:rPr sz="1500">
+                <a:solidFill>
+                  <a:srgbClr val="22282E"/>
+                </a:solidFill>
+              </a:rPr>
+              <a:t>•  Pocas y potentes: 5–7 con tendencia y semáforo. El detalle operativo va en un dashboard técnico aparte.</a:t>
+            </a:r>
+          </a:p>
+          <a:p>
+            <a:pPr>
+              <a:spcAft>
+                <a:spcPts val="600"/>
+              </a:spcAft>
+            </a:pPr>
+            <a:r>
+              <a:rPr sz="1500">
+                <a:solidFill>
+                  <a:srgbClr val="22282E"/>
+                </a:solidFill>
+              </a:rPr>
+              <a:t>•  ❓ ¿MTTD y MTTR de dónde salen?</a:t>
+            </a:r>
+          </a:p>
+          <a:p>
+            <a:pPr>
+              <a:spcAft>
+                <a:spcPts val="600"/>
+              </a:spcAft>
+            </a:pPr>
+            <a:r>
+              <a:rPr sz="1500">
+                <a:solidFill>
+                  <a:srgbClr val="22282E"/>
+                </a:solidFill>
+              </a:rPr>
+              <a:t>•  De los tickets/registros de incidentes: marca de tiempo de origen, detección y resolución. La calidad del dato depende de un buen registro de incidentes.</a:t>
+            </a:r>
+          </a:p>
+          <a:p>
+            <a:pPr>
+              <a:spcAft>
+                <a:spcPts val="600"/>
+              </a:spcAft>
+            </a:pPr>
+            <a:r>
+              <a:rPr sz="1500">
+                <a:solidFill>
+                  <a:srgbClr val="22282E"/>
+                </a:solidFill>
+              </a:rPr>
+              <a:t>•  ❓ ¿Cómo evito las vanity metrics?</a:t>
+            </a:r>
+          </a:p>
+        </p:txBody>
+      </p:sp>
+    </p:spTree>
+  </p:cSld>
+  <p:clrMapOvr>
+    <a:masterClrMapping/>
+  </p:clrMapOvr>
+</p:sld>
+</file>
+
+<file path=ppt/slides/slide15.xml><?xml version="1.0" encoding="utf-8"?>
+<p:sld xmlns:a="http://schemas.openxmlformats.org/drawingml/2006/main" xmlns:p="http://schemas.openxmlformats.org/presentationml/2006/main" xmlns:r="http://schemas.openxmlformats.org/officeDocument/2006/relationships">
+  <p:cSld>
+    <p:spTree>
+      <p:nvGrpSpPr>
+        <p:cNvPr id="1" name=""/>
+        <p:cNvGrpSpPr/>
+        <p:nvPr/>
+      </p:nvGrpSpPr>
+      <p:grpSpPr/>
+      <p:sp>
+        <p:nvSpPr>
+          <p:cNvPr id="2" name="TextBox 1"/>
+          <p:cNvSpPr txBox="1"/>
+          <p:nvPr/>
+        </p:nvSpPr>
+        <p:spPr>
+          <a:xfrm>
+            <a:off x="457200" y="320040"/>
+            <a:ext cx="8229600" cy="822960"/>
+          </a:xfrm>
+          <a:prstGeom prst="rect">
+            <a:avLst/>
+          </a:prstGeom>
+          <a:noFill/>
+        </p:spPr>
+        <p:txBody>
+          <a:bodyPr wrap="square">
+            <a:spAutoFit/>
+          </a:bodyPr>
+          <a:lstStyle/>
+          <a:p>
+            <a:r>
+              <a:rPr sz="2600" b="1">
+                <a:solidFill>
+                  <a:srgbClr val="0B3D2E"/>
+                </a:solidFill>
+              </a:rPr>
+              <a:t>🔗 Referencias</a:t>
+            </a:r>
+          </a:p>
+        </p:txBody>
+      </p:sp>
+      <p:sp>
+        <p:nvSpPr>
+          <p:cNvPr id="3" name="TextBox 2"/>
+          <p:cNvSpPr txBox="1"/>
+          <p:nvPr/>
+        </p:nvSpPr>
+        <p:spPr>
+          <a:xfrm>
+            <a:off x="457200" y="1280160"/>
+            <a:ext cx="8229600" cy="4937760"/>
+          </a:xfrm>
+          <a:prstGeom prst="rect">
+            <a:avLst/>
+          </a:prstGeom>
+          <a:noFill/>
+        </p:spPr>
+        <p:txBody>
+          <a:bodyPr wrap="square">
+            <a:spAutoFit/>
+          </a:bodyPr>
+          <a:lstStyle/>
+          <a:p>
+            <a:pPr>
+              <a:spcAft>
+                <a:spcPts val="600"/>
+              </a:spcAft>
+            </a:pPr>
+            <a:r>
+              <a:rPr sz="1500">
+                <a:solidFill>
+                  <a:srgbClr val="22282E"/>
+                </a:solidFill>
+              </a:rPr>
               <a:t>•  Hubbard &amp; Seiersen — How to Measure Anything in Cybersecurity Risk. &lt;https://www.howtomeasureanything.com/cybersecurity/&gt;</a:t>
             </a:r>
           </a:p>
@@ -3629,6 +4080,81 @@
           </a:p>
         </p:txBody>
       </p:sp>
+    </p:spTree>
+  </p:cSld>
+  <p:clrMapOvr>
+    <a:masterClrMapping/>
+  </p:clrMapOvr>
+</p:sld>
+</file>
+
+<file path=ppt/slides/slide16.xml><?xml version="1.0" encoding="utf-8"?>
+<p:sld xmlns:a="http://schemas.openxmlformats.org/drawingml/2006/main" xmlns:p="http://schemas.openxmlformats.org/presentationml/2006/main" xmlns:r="http://schemas.openxmlformats.org/officeDocument/2006/relationships">
+  <p:cSld>
+    <p:spTree>
+      <p:nvGrpSpPr>
+        <p:cNvPr id="1" name=""/>
+        <p:cNvGrpSpPr/>
+        <p:nvPr/>
+      </p:nvGrpSpPr>
+      <p:grpSpPr/>
+      <p:sp>
+        <p:nvSpPr>
+          <p:cNvPr id="2" name="TextBox 1"/>
+          <p:cNvSpPr txBox="1"/>
+          <p:nvPr/>
+        </p:nvSpPr>
+        <p:spPr>
+          <a:xfrm>
+            <a:off x="457200" y="274320"/>
+            <a:ext cx="8229600" cy="640080"/>
+          </a:xfrm>
+          <a:prstGeom prst="rect">
+            <a:avLst/>
+          </a:prstGeom>
+          <a:noFill/>
+        </p:spPr>
+        <p:txBody>
+          <a:bodyPr wrap="square">
+            <a:spAutoFit/>
+          </a:bodyPr>
+          <a:lstStyle/>
+          <a:p>
+            <a:r>
+              <a:rPr sz="2200" b="1">
+                <a:solidFill>
+                  <a:srgbClr val="0B3D2E"/>
+                </a:solidFill>
+              </a:rPr>
+              <a:t>Diagrama de la clase</a:t>
+            </a:r>
+          </a:p>
+        </p:txBody>
+      </p:sp>
+      <p:pic>
+        <p:nvPicPr>
+          <p:cNvPr id="3" name="Picture 2" descr="4c9946e1ffb1c6b1.png"/>
+          <p:cNvPicPr>
+            <a:picLocks noChangeAspect="1"/>
+          </p:cNvPicPr>
+          <p:nvPr/>
+        </p:nvPicPr>
+        <p:blipFill>
+          <a:blip r:embed="rId2"/>
+          <a:stretch>
+            <a:fillRect/>
+          </a:stretch>
+        </p:blipFill>
+        <p:spPr>
+          <a:xfrm>
+            <a:off x="457200" y="3465576"/>
+            <a:ext cx="8229600" cy="566928"/>
+          </a:xfrm>
+          <a:prstGeom prst="rect">
+            <a:avLst/>
+          </a:prstGeom>
+        </p:spPr>
+      </p:pic>
     </p:spTree>
   </p:cSld>
   <p:clrMapOvr>
@@ -3713,7 +4239,7 @@
                   <a:srgbClr val="22282E"/>
                 </a:solidFill>
               </a:rPr>
-              <a:t>•  Aprender a medir la seguridad con indicadores que impulsen decisiones: KPIs (rendimiento), KRIs (riesgo) y KCIs (control). Al terminar sabrás diseñar métricas SMART, distinguir un indicador accionable de una "vanity metric", construir un cuadro de mando (dashboard) para la dirección y evitar el error de medir lo fácil en vez de lo importante.</a:t>
+              <a:t>•  Aprender a medir la seguridad con indicadores que impulsen decisiones: KPIs (rendimiento), KRIs (riesgo) y KCIs (control). Al terminar sabrás diseñar métricas SMART, distinguir un indicador…</a:t>
             </a:r>
           </a:p>
         </p:txBody>
@@ -4107,7 +4633,7 @@
                   <a:srgbClr val="0B3D2E"/>
                 </a:solidFill>
               </a:rPr>
-              <a:t>📖 Definiciones y características</a:t>
+              <a:t>🧠 Explicación en profundidad</a:t>
             </a:r>
           </a:p>
         </p:txBody>
@@ -4145,97 +4671,22 @@
                   <a:srgbClr val="22282E"/>
                 </a:solidFill>
               </a:rPr>
-              <a:t>•  KPI (Key Performance Indicator): mide el rendimiento hacia un objetivo. Clave: mira lo que ya pasó/está pasando (retrospectivo).</a:t>
-            </a:r>
-          </a:p>
-          <a:p>
-            <a:pPr>
-              <a:spcAft>
-                <a:spcPts val="600"/>
-              </a:spcAft>
-            </a:pPr>
-            <a:r>
-              <a:rPr sz="1500">
-                <a:solidFill>
-                  <a:srgbClr val="22282E"/>
-                </a:solidFill>
-              </a:rPr>
-              <a:t>•  KRI (Key Risk Indicator): señala aumento de exposición al riesgo antes de que se materialice. Clave: predictivo, alerta temprana.</a:t>
-            </a:r>
-          </a:p>
-          <a:p>
-            <a:pPr>
-              <a:spcAft>
-                <a:spcPts val="600"/>
-              </a:spcAft>
-            </a:pPr>
-            <a:r>
-              <a:rPr sz="1500">
-                <a:solidFill>
-                  <a:srgbClr val="22282E"/>
-                </a:solidFill>
-              </a:rPr>
-              <a:t>•  KCI (Key Control Indicator): mide la eficacia de un control. Clave: ¿el control funciona como se espera?</a:t>
-            </a:r>
-          </a:p>
-          <a:p>
-            <a:pPr>
-              <a:spcAft>
-                <a:spcPts val="600"/>
-              </a:spcAft>
-            </a:pPr>
-            <a:r>
-              <a:rPr sz="1500">
-                <a:solidFill>
-                  <a:srgbClr val="22282E"/>
-                </a:solidFill>
-              </a:rPr>
-              <a:t>•  MTTD (Mean Time To Detect): tiempo medio en detectar un incidente. Clave: menor es mejor; mide visibilidad.</a:t>
-            </a:r>
-          </a:p>
-          <a:p>
-            <a:pPr>
-              <a:spcAft>
-                <a:spcPts val="600"/>
-              </a:spcAft>
-            </a:pPr>
-            <a:r>
-              <a:rPr sz="1500">
-                <a:solidFill>
-                  <a:srgbClr val="22282E"/>
-                </a:solidFill>
-              </a:rPr>
-              <a:t>•  MTTR (Mean Time To Respond/Recover): tiempo medio en responder o recuperar. Clave: mide la eficacia de la respuesta.</a:t>
-            </a:r>
-          </a:p>
-          <a:p>
-            <a:pPr>
-              <a:spcAft>
-                <a:spcPts val="600"/>
-              </a:spcAft>
-            </a:pPr>
-            <a:r>
-              <a:rPr sz="1500">
-                <a:solidFill>
-                  <a:srgbClr val="22282E"/>
-                </a:solidFill>
-              </a:rPr>
-              <a:t>•  Vanity metric: número que impresiona pero no guía decisiones (p. ej. "bloqueamos 2M de ataques"). Clave: evítala en informes de decisión.</a:t>
-            </a:r>
-          </a:p>
-          <a:p>
-            <a:pPr>
-              <a:spcAft>
-                <a:spcPts val="600"/>
-              </a:spcAft>
-            </a:pPr>
-            <a:r>
-              <a:rPr sz="1500">
-                <a:solidFill>
-                  <a:srgbClr val="22282E"/>
-                </a:solidFill>
-              </a:rPr>
-              <a:t>•  Umbral (threshold): valor que dispara una acción. Clave: convierte una métrica en un semáforo accionable.</a:t>
+              <a:t>•  Una métrica útil conecta una pregunta con definición, fuente, frecuencia, dueño, umbral y decisión. KPI observa desempeño; KRI señala exposición; una medida puede cambiar de función según contexto.…</a:t>
+            </a:r>
+          </a:p>
+          <a:p>
+            <a:pPr>
+              <a:spcAft>
+                <a:spcPts val="600"/>
+              </a:spcAft>
+            </a:pPr>
+            <a:r>
+              <a:rPr sz="1500">
+                <a:solidFill>
+                  <a:srgbClr val="22282E"/>
+                </a:solidFill>
+              </a:rPr>
+              <a:t>•  El tiempo medio de parche baja mientras críticos antiguos permanecen. Percentiles y edad por riesgo revelan la cola.</a:t>
             </a:r>
           </a:p>
         </p:txBody>
@@ -4286,7 +4737,7 @@
                   <a:srgbClr val="0B3D2E"/>
                 </a:solidFill>
               </a:rPr>
-              <a:t>🧰 Herramientas y preparación</a:t>
+              <a:t>📔 Glosario operativo</a:t>
             </a:r>
           </a:p>
         </p:txBody>
@@ -4324,52 +4775,52 @@
                   <a:srgbClr val="22282E"/>
                 </a:solidFill>
               </a:rPr>
-              <a:t>•  Hoja de cálculo o herramienta de BI (Grafana, Metabase, Power BI) para el dashboard.</a:t>
-            </a:r>
-          </a:p>
-          <a:p>
-            <a:pPr>
-              <a:spcAft>
-                <a:spcPts val="600"/>
-              </a:spcAft>
-            </a:pPr>
-            <a:r>
-              <a:rPr sz="1500">
-                <a:solidFill>
-                  <a:srgbClr val="22282E"/>
-                </a:solidFill>
-              </a:rPr>
-              <a:t>•  Fuentes de datos: exportaciones de SIEM, gestor de vulnerabilidades, IAM, ticketing (reutiliza herramientas de partes previas).</a:t>
-            </a:r>
-          </a:p>
-          <a:p>
-            <a:pPr>
-              <a:spcAft>
-                <a:spcPts val="600"/>
-              </a:spcAft>
-            </a:pPr>
-            <a:r>
-              <a:rPr sz="1500">
-                <a:solidFill>
-                  <a:srgbClr val="22282E"/>
-                </a:solidFill>
-              </a:rPr>
-              <a:t>•  Referencia: CIS Controls Measures &amp; Metrics, NIST SP 800-55 (Performance Measurement) y el enfoque de Hubbard sobre medición.</a:t>
-            </a:r>
-          </a:p>
-          <a:p>
-            <a:pPr>
-              <a:spcAft>
-                <a:spcPts val="600"/>
-              </a:spcAft>
-            </a:pPr>
-            <a:r>
-              <a:rPr sz="1500">
-                <a:solidFill>
-                  <a:srgbClr val="22282E"/>
-                </a:solidFill>
-              </a:rPr>
-              <a:t>•  Plantilla de ficha de métrica: nombre, tipo (KPI/KRI/KCI), fórmula, fuente, umbral, responsable, cadencia.</a:t>
+              <a:t>•  Término — Definición</a:t>
+            </a:r>
+          </a:p>
+          <a:p>
+            <a:pPr>
+              <a:spcAft>
+                <a:spcPts val="600"/>
+              </a:spcAft>
+            </a:pPr>
+            <a:r>
+              <a:rPr sz="1500">
+                <a:solidFill>
+                  <a:srgbClr val="22282E"/>
+                </a:solidFill>
+              </a:rPr>
+              <a:t>•  KPI — Indicador de desempeño frente a objetivo.</a:t>
+            </a:r>
+          </a:p>
+          <a:p>
+            <a:pPr>
+              <a:spcAft>
+                <a:spcPts val="600"/>
+              </a:spcAft>
+            </a:pPr>
+            <a:r>
+              <a:rPr sz="1500">
+                <a:solidFill>
+                  <a:srgbClr val="22282E"/>
+                </a:solidFill>
+              </a:rPr>
+              <a:t>•  KRI — Indicador de exposición o cambio de riesgo.</a:t>
+            </a:r>
+          </a:p>
+          <a:p>
+            <a:pPr>
+              <a:spcAft>
+                <a:spcPts val="600"/>
+              </a:spcAft>
+            </a:pPr>
+            <a:r>
+              <a:rPr sz="1500">
+                <a:solidFill>
+                  <a:srgbClr val="22282E"/>
+                </a:solidFill>
+              </a:rPr>
+              <a:t>•  Goodhart — Riesgo de degradar una medida al convertirla en objetivo rígido.</a:t>
             </a:r>
           </a:p>
         </p:txBody>
@@ -4420,7 +4871,7 @@
                   <a:srgbClr val="0B3D2E"/>
                 </a:solidFill>
               </a:rPr>
-              <a:t>🧪 Laboratorio guiado (ejercicio aplicado)</a:t>
+              <a:t>✅ Criterio de dominio</a:t>
             </a:r>
           </a:p>
         </p:txBody>
@@ -4458,97 +4909,7 @@
                   <a:srgbClr val="22282E"/>
                 </a:solidFill>
               </a:rPr>
-              <a:t>•  Vas a construir el cuadro de mando de seguridad de "Ferretería del Sur S.A.".</a:t>
-            </a:r>
-          </a:p>
-          <a:p>
-            <a:pPr>
-              <a:spcAft>
-                <a:spcPts val="600"/>
-              </a:spcAft>
-            </a:pPr>
-            <a:r>
-              <a:rPr sz="1500">
-                <a:solidFill>
-                  <a:srgbClr val="22282E"/>
-                </a:solidFill>
-              </a:rPr>
-              <a:t>•  Inventario de preguntas: escribe las 5 preguntas que la dirección se hace ("¿estamos más seguros que hace 3 meses?", "¿respondemos rápido?", "¿cumplimos parches?"). Las métricas responderán a estas preguntas, no al revés.</a:t>
-            </a:r>
-          </a:p>
-          <a:p>
-            <a:pPr>
-              <a:spcAft>
-                <a:spcPts val="600"/>
-              </a:spcAft>
-            </a:pPr>
-            <a:r>
-              <a:rPr sz="1500">
-                <a:solidFill>
-                  <a:srgbClr val="22282E"/>
-                </a:solidFill>
-              </a:rPr>
-              <a:t>•  Diseña 8 métricas con su ficha completa. Ejemplos:</a:t>
-            </a:r>
-          </a:p>
-          <a:p>
-            <a:pPr>
-              <a:spcAft>
-                <a:spcPts val="600"/>
-              </a:spcAft>
-            </a:pPr>
-            <a:r>
-              <a:rPr sz="1500">
-                <a:solidFill>
-                  <a:srgbClr val="22282E"/>
-                </a:solidFill>
-              </a:rPr>
-              <a:t>•  KPI: % de sistemas con parches críticos aplicados en &lt; 30 días (umbral ≥ 95%).</a:t>
-            </a:r>
-          </a:p>
-          <a:p>
-            <a:pPr>
-              <a:spcAft>
-                <a:spcPts val="600"/>
-              </a:spcAft>
-            </a:pPr>
-            <a:r>
-              <a:rPr sz="1500">
-                <a:solidFill>
-                  <a:srgbClr val="22282E"/>
-                </a:solidFill>
-              </a:rPr>
-              <a:t>•  KRI: nº de vulnerabilidades críticas abiertas &gt; 30 días (umbral ≤ 5).</a:t>
-            </a:r>
-          </a:p>
-          <a:p>
-            <a:pPr>
-              <a:spcAft>
-                <a:spcPts val="600"/>
-              </a:spcAft>
-            </a:pPr>
-            <a:r>
-              <a:rPr sz="1500">
-                <a:solidFill>
-                  <a:srgbClr val="22282E"/>
-                </a:solidFill>
-              </a:rPr>
-              <a:t>•  KCI: % de accesos con MFA activo (umbral 100%).</a:t>
-            </a:r>
-          </a:p>
-          <a:p>
-            <a:pPr>
-              <a:spcAft>
-                <a:spcPts val="600"/>
-              </a:spcAft>
-            </a:pPr>
-            <a:r>
-              <a:rPr sz="1500">
-                <a:solidFill>
-                  <a:srgbClr val="22282E"/>
-                </a:solidFill>
-              </a:rPr>
-              <a:t>•  Operativa: MTTD y MTTR de incidentes del último trimestre.</a:t>
+              <a:t>•  El alumno define una métrica reproducible y demuestra qué decisión cambia y cómo evita incentivos adversos.</a:t>
             </a:r>
           </a:p>
         </p:txBody>
@@ -4599,7 +4960,7 @@
                   <a:srgbClr val="0B3D2E"/>
                 </a:solidFill>
               </a:rPr>
-              <a:t>✍️ Ejercicios</a:t>
+              <a:t>📖 Definiciones y características</a:t>
             </a:r>
           </a:p>
         </p:txBody>
@@ -4637,82 +4998,97 @@
                   <a:srgbClr val="22282E"/>
                 </a:solidFill>
               </a:rPr>
-              <a:t>•  Clasifica en KPI, KRI o KCI: % de cuentas con MFA; nº de accesos de administrador anómalos; días desde el último parche crítico pendiente.</a:t>
-            </a:r>
-          </a:p>
-          <a:p>
-            <a:pPr>
-              <a:spcAft>
-                <a:spcPts val="600"/>
-              </a:spcAft>
-            </a:pPr>
-            <a:r>
-              <a:rPr sz="1500">
-                <a:solidFill>
-                  <a:srgbClr val="22282E"/>
-                </a:solidFill>
-              </a:rPr>
-              <a:t>•  Reformula la vanity metric "bloqueamos 2 millones de ataques" en una métrica accionable.</a:t>
-            </a:r>
-          </a:p>
-          <a:p>
-            <a:pPr>
-              <a:spcAft>
-                <a:spcPts val="600"/>
-              </a:spcAft>
-            </a:pPr>
-            <a:r>
-              <a:rPr sz="1500">
-                <a:solidFill>
-                  <a:srgbClr val="22282E"/>
-                </a:solidFill>
-              </a:rPr>
-              <a:t>•  Calcula el MTTR dado un conjunto de 5 incidentes con sus tiempos.</a:t>
-            </a:r>
-          </a:p>
-          <a:p>
-            <a:pPr>
-              <a:spcAft>
-                <a:spcPts val="600"/>
-              </a:spcAft>
-            </a:pPr>
-            <a:r>
-              <a:rPr sz="1500">
-                <a:solidFill>
-                  <a:srgbClr val="22282E"/>
-                </a:solidFill>
-              </a:rPr>
-              <a:t>•  Define umbrales verde/ámbar/rojo para "cobertura de EDR en endpoints".</a:t>
-            </a:r>
-          </a:p>
-          <a:p>
-            <a:pPr>
-              <a:spcAft>
-                <a:spcPts val="600"/>
-              </a:spcAft>
-            </a:pPr>
-            <a:r>
-              <a:rPr sz="1500">
-                <a:solidFill>
-                  <a:srgbClr val="22282E"/>
-                </a:solidFill>
-              </a:rPr>
-              <a:t>•  Diseña una métrica SMART para medir la eficacia del programa de concienciación.</a:t>
-            </a:r>
-          </a:p>
-          <a:p>
-            <a:pPr>
-              <a:spcAft>
-                <a:spcPts val="600"/>
-              </a:spcAft>
-            </a:pPr>
-            <a:r>
-              <a:rPr sz="1500">
-                <a:solidFill>
-                  <a:srgbClr val="22282E"/>
-                </a:solidFill>
-              </a:rPr>
-              <a:t>•  Explica por qué la tendencia importa más que el valor absoluto.</a:t>
+              <a:t>•  KPI (Key Performance Indicator): mide el rendimiento hacia un objetivo. Clave: mira lo que ya pasó/está pasando (retrospectivo).</a:t>
+            </a:r>
+          </a:p>
+          <a:p>
+            <a:pPr>
+              <a:spcAft>
+                <a:spcPts val="600"/>
+              </a:spcAft>
+            </a:pPr>
+            <a:r>
+              <a:rPr sz="1500">
+                <a:solidFill>
+                  <a:srgbClr val="22282E"/>
+                </a:solidFill>
+              </a:rPr>
+              <a:t>•  KRI (Key Risk Indicator): señala aumento de exposición al riesgo antes de que se materialice. Clave: predictivo, alerta temprana.</a:t>
+            </a:r>
+          </a:p>
+          <a:p>
+            <a:pPr>
+              <a:spcAft>
+                <a:spcPts val="600"/>
+              </a:spcAft>
+            </a:pPr>
+            <a:r>
+              <a:rPr sz="1500">
+                <a:solidFill>
+                  <a:srgbClr val="22282E"/>
+                </a:solidFill>
+              </a:rPr>
+              <a:t>•  KCI (Key Control Indicator): mide la eficacia de un control. Clave: ¿el control funciona como se espera?</a:t>
+            </a:r>
+          </a:p>
+          <a:p>
+            <a:pPr>
+              <a:spcAft>
+                <a:spcPts val="600"/>
+              </a:spcAft>
+            </a:pPr>
+            <a:r>
+              <a:rPr sz="1500">
+                <a:solidFill>
+                  <a:srgbClr val="22282E"/>
+                </a:solidFill>
+              </a:rPr>
+              <a:t>•  MTTD (Mean Time To Detect): tiempo medio en detectar un incidente. Clave: menor es mejor; mide visibilidad.</a:t>
+            </a:r>
+          </a:p>
+          <a:p>
+            <a:pPr>
+              <a:spcAft>
+                <a:spcPts val="600"/>
+              </a:spcAft>
+            </a:pPr>
+            <a:r>
+              <a:rPr sz="1500">
+                <a:solidFill>
+                  <a:srgbClr val="22282E"/>
+                </a:solidFill>
+              </a:rPr>
+              <a:t>•  MTTR (Mean Time To Respond/Recover): tiempo medio en responder o recuperar. Clave: mide la eficacia de la respuesta.</a:t>
+            </a:r>
+          </a:p>
+          <a:p>
+            <a:pPr>
+              <a:spcAft>
+                <a:spcPts val="600"/>
+              </a:spcAft>
+            </a:pPr>
+            <a:r>
+              <a:rPr sz="1500">
+                <a:solidFill>
+                  <a:srgbClr val="22282E"/>
+                </a:solidFill>
+              </a:rPr>
+              <a:t>•  Vanity metric: número que impresiona pero no guía decisiones (p. ej. "bloqueamos 2M de ataques"). Clave: evítala en informes de decisión.</a:t>
+            </a:r>
+          </a:p>
+          <a:p>
+            <a:pPr>
+              <a:spcAft>
+                <a:spcPts val="600"/>
+              </a:spcAft>
+            </a:pPr>
+            <a:r>
+              <a:rPr sz="1500">
+                <a:solidFill>
+                  <a:srgbClr val="22282E"/>
+                </a:solidFill>
+              </a:rPr>
+              <a:t>•  Umbral (threshold): valor que dispara una acción. Clave: convierte una métrica en un semáforo accionable.</a:t>
             </a:r>
           </a:p>
         </p:txBody>
@@ -4763,7 +5139,7 @@
                   <a:srgbClr val="0B3D2E"/>
                 </a:solidFill>
               </a:rPr>
-              <a:t>📝 Reto verificable</a:t>
+              <a:t>🧰 Herramientas y preparación</a:t>
             </a:r>
           </a:p>
         </p:txBody>
@@ -4801,22 +5177,52 @@
                   <a:srgbClr val="22282E"/>
                 </a:solidFill>
               </a:rPr>
-              <a:t>•  Entrega un cuadro de mando de seguridad con al menos 8 métricas (mezcla de KPI, KRI y KCI), cada una con ficha completa (fórmula, fuente, umbral, responsable, cadencia), dos métricas calculadas con datos de ejemplo, semáforos definidos, y una narrativa ejecutiva de acompañamiento.</a:t>
-            </a:r>
-          </a:p>
-          <a:p>
-            <a:pPr>
-              <a:spcAft>
-                <a:spcPts val="600"/>
-              </a:spcAft>
-            </a:pPr>
-            <a:r>
-              <a:rPr sz="1500">
-                <a:solidFill>
-                  <a:srgbClr val="22282E"/>
-                </a:solidFill>
-              </a:rPr>
-              <a:t>•  Criterio de aceptación: cada métrica responde a una pregunta de negocio, ninguna es una vanity metric, todas tienen umbral y responsable, y el dashboard de dirección cabe en una página con tendencias.</a:t>
+              <a:t>•  Hoja de cálculo o herramienta de BI (Grafana, Metabase, Power BI) para el dashboard.</a:t>
+            </a:r>
+          </a:p>
+          <a:p>
+            <a:pPr>
+              <a:spcAft>
+                <a:spcPts val="600"/>
+              </a:spcAft>
+            </a:pPr>
+            <a:r>
+              <a:rPr sz="1500">
+                <a:solidFill>
+                  <a:srgbClr val="22282E"/>
+                </a:solidFill>
+              </a:rPr>
+              <a:t>•  Fuentes de datos: exportaciones de SIEM, gestor de vulnerabilidades, IAM, ticketing (reutiliza herramientas de partes previas).</a:t>
+            </a:r>
+          </a:p>
+          <a:p>
+            <a:pPr>
+              <a:spcAft>
+                <a:spcPts val="600"/>
+              </a:spcAft>
+            </a:pPr>
+            <a:r>
+              <a:rPr sz="1500">
+                <a:solidFill>
+                  <a:srgbClr val="22282E"/>
+                </a:solidFill>
+              </a:rPr>
+              <a:t>•  Referencia: CIS Controls Measures &amp; Metrics, NIST SP 800-55 (Performance Measurement) y el enfoque de Hubbard sobre medición.</a:t>
+            </a:r>
+          </a:p>
+          <a:p>
+            <a:pPr>
+              <a:spcAft>
+                <a:spcPts val="600"/>
+              </a:spcAft>
+            </a:pPr>
+            <a:r>
+              <a:rPr sz="1500">
+                <a:solidFill>
+                  <a:srgbClr val="22282E"/>
+                </a:solidFill>
+              </a:rPr>
+              <a:t>•  Plantilla de ficha de métrica: nombre, tipo (KPI/KRI/KCI), fórmula, fuente, umbral, responsable, cadencia.</a:t>
             </a:r>
           </a:p>
         </p:txBody>
